--- a/cursos/recursos/desequilibrios-de-material/12-sacrificios-de-calidad-i.pptx
+++ b/cursos/recursos/desequilibrios-de-material/12-sacrificios-de-calidad-i.pptx
@@ -3485,7 +3485,7 @@
                 </a:solidFill>
                 <a:latin typeface="Calibri"/>
               </a:rPr>
-              <a:t>Pista: Pensá en una jugada de dama a una casilla defendida, evitando f5 y amenazando además e2-e4.</a:t>
+              <a:t>Pista: Piensa en una jugada de dama a una casilla defendida, evitando f5 y amenazando además e2-e4.</a:t>
             </a:r>
           </a:p>
         </p:txBody>
@@ -3808,7 +3808,7 @@
                 </a:solidFill>
                 <a:latin typeface="Calibri"/>
               </a:rPr>
-              <a:t>Pista: Pensá en colocar la torre delante del futuro peón b negro, sobre la tercera fila.</a:t>
+              <a:t>Pista: Piensa en colocar la torre delante del futuro peón b negro, sobre la tercera fila.</a:t>
             </a:r>
           </a:p>
         </p:txBody>
@@ -4131,7 +4131,7 @@
                 </a:solidFill>
                 <a:latin typeface="Calibri"/>
               </a:rPr>
-              <a:t>Pista: Pensá en un avance de peón en el flanco de dama que fije la estructura sin abrir líneas para las torres negras.</a:t>
+              <a:t>Pista: Piensa en un avance de peón en el flanco de dama que fije la estructura sin abrir líneas para las torres negras.</a:t>
             </a:r>
           </a:p>
         </p:txBody>
@@ -4454,7 +4454,7 @@
                 </a:solidFill>
                 <a:latin typeface="Calibri"/>
               </a:rPr>
-              <a:t>Pista: Pensá en avanzar el peón h para impedir de raíz el avance del peón g negro.</a:t>
+              <a:t>Pista: Piensa en avanzar el peón h para impedir de raíz el avance del peón g negro.</a:t>
             </a:r>
           </a:p>
         </p:txBody>
@@ -4905,7 +4905,7 @@
                 </a:solidFill>
                 <a:latin typeface="Calibri"/>
               </a:rPr>
-              <a:t>•  Cuando tenés la iniciativa, no hace falta apurarse a recuperar el material: jugadas de maniobra como reubicar un alfil (31.Ac1!) o triangular con la dama (28.Df1!-29.Df2!) pueden ser más valiosas que una recuperación inmediata.</a:t>
+              <a:t>•  Cuando tienes la iniciativa, no hace falta apurarse a recuperar el material: jugadas de maniobra como reubicar un alfil (31.Ac1!) o triangular con la dama (28.Df1!-29.Df2!) pueden ser más valiosas que una recuperación inmediata.</a:t>
             </a:r>
           </a:p>
           <a:p>
@@ -5309,7 +5309,7 @@
                 </a:solidFill>
                 <a:latin typeface="Calibri"/>
               </a:rPr>
-              <a:t>Pista: Pensá en capturar el caballo en e4 con la torre, aceptando entregar calidad para debilitar los peones e4 y c6.</a:t>
+              <a:t>Pista: Piensa en capturar el caballo en e4 con la torre, aceptando entregar calidad para debilitar los peones e4 y c6.</a:t>
             </a:r>
           </a:p>
         </p:txBody>
@@ -5632,7 +5632,7 @@
                 </a:solidFill>
                 <a:latin typeface="Calibri"/>
               </a:rPr>
-              <a:t>Pista: Pensá en un avance de peón que controle la casilla f5 sin perder tiempo.</a:t>
+              <a:t>Pista: Piensa en un avance de peón que controle la casilla f5 sin perder tiempo.</a:t>
             </a:r>
           </a:p>
         </p:txBody>
@@ -5955,7 +5955,7 @@
                 </a:solidFill>
                 <a:latin typeface="Calibri"/>
               </a:rPr>
-              <a:t>Pista: Pensá en capturar con el caballo el peón c6, aceptando perder luego el peón e4.</a:t>
+              <a:t>Pista: Piensa en capturar con el caballo el peón c6, aceptando perder luego el peón e4.</a:t>
             </a:r>
           </a:p>
         </p:txBody>
@@ -6453,7 +6453,7 @@
                 </a:solidFill>
                 <a:latin typeface="Calibri"/>
               </a:rPr>
-              <a:t>Pista: Pensá en retroceder el alfil desde una casilla vulnerable hacia su casilla original, con la idea de reubicarlo en f4.</a:t>
+              <a:t>Pista: Piensa en retroceder el alfil desde una casilla vulnerable hacia su casilla original, con la idea de reubicarlo en f4.</a:t>
             </a:r>
           </a:p>
         </p:txBody>
@@ -6776,7 +6776,7 @@
                 </a:solidFill>
                 <a:latin typeface="Calibri"/>
               </a:rPr>
-              <a:t>Pista: Pensá en repetir la misma idea que dieciocho jugadas atrás: cambiar la torre por la pieza que frena el avance central.</a:t>
+              <a:t>Pista: Piensa en repetir la misma idea que dieciocho jugadas atrás: cambiar la torre por la pieza que frena el avance central.</a:t>
             </a:r>
           </a:p>
         </p:txBody>
@@ -7099,7 +7099,7 @@
                 </a:solidFill>
                 <a:latin typeface="Calibri"/>
               </a:rPr>
-              <a:t>Pista: Pensá en ofrecer el cambio de damas directamente, sabiendo que las negras no tienen forma de evitarlo con ventaja.</a:t>
+              <a:t>Pista: Piensa en ofrecer el cambio de damas directamente, sabiendo que las negras no tienen forma de evitarlo con ventaja.</a:t>
             </a:r>
           </a:p>
         </p:txBody>
@@ -7336,7 +7336,7 @@
                 </a:solidFill>
                 <a:latin typeface="Calibri"/>
               </a:rPr>
-              <a:t>•  Cuando tenés la iniciativa, no hace falta apurarse a recuperar el material: jugadas de maniobra como reubicar un alfil (31.Ac1!) o triangular con la dama (28.Df1!-29.Df2!) pueden ser más valiosas que una recuperación inmediata.</a:t>
+              <a:t>•  Cuando tienes la iniciativa, no hace falta apurarse a recuperar el material: jugadas de maniobra como reubicar un alfil (31.Ac1!) o triangular con la dama (28.Df1!-29.Df2!) pueden ser más valiosas que una recuperación inmediata.</a:t>
             </a:r>
           </a:p>
           <a:p>
@@ -7550,7 +7550,7 @@
                 </a:solidFill>
                 <a:latin typeface="Calibri"/>
               </a:rPr>
-              <a:t>•  Cuando tenés iniciativa y el rey rival está expuesto, mantener las damas en el tablero (22.Db1!) suele favorecer al atacante, ya que multiplica las amenazas.</a:t>
+              <a:t>•  Cuando tienes iniciativa y el rey rival está expuesto, mantener las damas en el tablero (22.Db1!) suele favorecer al atacante, ya que multiplica las amenazas.</a:t>
             </a:r>
           </a:p>
           <a:p>
@@ -7954,7 +7954,7 @@
                 </a:solidFill>
                 <a:latin typeface="Calibri"/>
               </a:rPr>
-              <a:t>Pista: Pensá en avanzar el peón a hasta la quinta fila, dejando la torre a1 disponible para ser capturada.</a:t>
+              <a:t>Pista: Piensa en avanzar el peón a hasta la quinta fila, dejando la torre a1 disponible para ser capturada.</a:t>
             </a:r>
           </a:p>
         </p:txBody>
@@ -8277,7 +8277,7 @@
                 </a:solidFill>
                 <a:latin typeface="Calibri"/>
               </a:rPr>
-              <a:t>Pista: Pensá en capturar el peón c4 con la torre situada en a4, activando aún más la posición blanca.</a:t>
+              <a:t>Pista: Piensa en capturar el peón c4 con la torre situada en a4, activando aún más la posición blanca.</a:t>
             </a:r>
           </a:p>
         </p:txBody>
@@ -8600,7 +8600,7 @@
                 </a:solidFill>
                 <a:latin typeface="Calibri"/>
               </a:rPr>
-              <a:t>Pista: Pensá en una jugada de dama modesta, evitando el cambio y preparando activar la torre con tiempo.</a:t>
+              <a:t>Pista: Piensa en una jugada de dama modesta, evitando el cambio y preparando activar la torre con tiempo.</a:t>
             </a:r>
           </a:p>
         </p:txBody>
@@ -8923,7 +8923,7 @@
                 </a:solidFill>
                 <a:latin typeface="Calibri"/>
               </a:rPr>
-              <a:t>Pista: Pensá en capturar el caballo en d4 con la torre, entregando más material a cambio de rematar el ataque.</a:t>
+              <a:t>Pista: Piensa en capturar el caballo en d4 con la torre, entregando más material a cambio de rematar el ataque.</a:t>
             </a:r>
           </a:p>
         </p:txBody>
@@ -9389,7 +9389,7 @@
                 </a:solidFill>
                 <a:latin typeface="Calibri"/>
               </a:rPr>
-              <a:t>Pista: Pensá en capturar el peón f7 con el alfil, dando jaque y ganando un tiempo más para el ataque.</a:t>
+              <a:t>Pista: Piensa en capturar el peón f7 con el alfil, dando jaque y ganando un tiempo más para el ataque.</a:t>
             </a:r>
           </a:p>
         </p:txBody>
@@ -9626,7 +9626,7 @@
                 </a:solidFill>
                 <a:latin typeface="Calibri"/>
               </a:rPr>
-              <a:t>•  Cuando tenés iniciativa y el rey rival está expuesto, mantener las damas en el tablero (22.Db1!) suele favorecer al atacante, ya que multiplica las amenazas.</a:t>
+              <a:t>•  Cuando tienes iniciativa y el rey rival está expuesto, mantener las damas en el tablero (22.Db1!) suele favorecer al atacante, ya que multiplica las amenazas.</a:t>
             </a:r>
           </a:p>
           <a:p>
@@ -9785,7 +9785,7 @@
                 </a:solidFill>
                 <a:latin typeface="Calibri"/>
               </a:rPr>
-              <a:t>Jugá la posición de Nimzowitsch–Berger contra el motor con el bando de la torre, tratando de encontrar actividad antes de que los peones pasados negros se vuelvan imparables. Después estudiá Kramnik–McShane señalando en qué jugada queda claro que el complejo de casillas claras compensa por completo la calidad entregada.</a:t>
+              <a:t>Juega la posición de Nimzowitsch–Berger contra el motor con el bando de la torre, tratando de encontrar actividad antes de que los peones pasados negros se vuelvan imparables. Después estudia Kramnik–McShane señalando en qué jugada queda claro que el complejo de casillas claras compensa por completo la calidad entregada.</a:t>
             </a:r>
           </a:p>
           <a:p>
@@ -9817,7 +9817,7 @@
                 </a:solidFill>
                 <a:latin typeface="Calibri"/>
               </a:rPr>
-              <a:t>En la página del curso podés recorrer cada partida con los comentarios, adivinar las jugadas clave en el tablero y continuar cualquier posición contra el motor (Stockfish). La hoja de ejercicios en PDF reúne los momentos clave de esta lección para resolver sin tablero.</a:t>
+              <a:t>En la página del curso puedes recorrer cada partida con los comentarios, adivinar las jugadas clave en el tablero y continuar cualquier posición contra el motor (Stockfish). La hoja de ejercicios en PDF reúne los momentos clave de esta lección para resolver sin tablero.</a:t>
             </a:r>
           </a:p>
         </p:txBody>
@@ -9856,7 +9856,7 @@
                 </a:solidFill>
                 <a:latin typeface="Calibri"/>
               </a:rPr>
-              <a:t>•  Primero recorré la partida completa leyendo los comentarios.</a:t>
+              <a:t>•  Primero recorre la partida completa leyendo los comentarios.</a:t>
             </a:r>
           </a:p>
           <a:p>
@@ -9872,7 +9872,7 @@
                 </a:solidFill>
                 <a:latin typeface="Calibri"/>
               </a:rPr>
-              <a:t>•  Después hacé el modo "adivinar las jugadas clave" hasta acertar todas.</a:t>
+              <a:t>•  Después haz el modo "adivinar las jugadas clave" hasta acertar todas.</a:t>
             </a:r>
           </a:p>
           <a:p>
@@ -9888,7 +9888,7 @@
                 </a:solidFill>
                 <a:latin typeface="Calibri"/>
               </a:rPr>
-              <a:t>•  Por último respondé el cuestionario y anotá con tus palabras las reglas de la lección.</a:t>
+              <a:t>•  Por último responde el cuestionario y anota con tus palabras las reglas de la lección.</a:t>
             </a:r>
           </a:p>
         </p:txBody>
@@ -10349,7 +10349,7 @@
                 </a:solidFill>
                 <a:latin typeface="Calibri"/>
               </a:rPr>
-              <a:t>•  Antes de entregar la calidad, asegurate de que la posición resultante vaya a ser estable.</a:t>
+              <a:t>•  Antes de entregar la calidad, asegúrate de que la posición resultante vaya a ser estable.</a:t>
             </a:r>
           </a:p>
           <a:p>
@@ -10365,7 +10365,7 @@
                 </a:solidFill>
                 <a:latin typeface="Calibri"/>
               </a:rPr>
-              <a:t>•  Preferí sacrificar la calidad en posiciones cerradas donde tu pieza menor domine una casilla inamovible.</a:t>
+              <a:t>•  Prefiere sacrificar la calidad en posiciones cerradas donde tu pieza menor domine una casilla inamovible.</a:t>
             </a:r>
           </a:p>
           <a:p>
@@ -10381,7 +10381,7 @@
                 </a:solidFill>
                 <a:latin typeface="Calibri"/>
               </a:rPr>
-              <a:t>•  Buscá peones pasados conectados como complemento del sacrificio: por sí solos pueden decidir la partida.</a:t>
+              <a:t>•  Busca peones pasados conectados como complemento del sacrificio: por sí solos pueden decidir la partida.</a:t>
             </a:r>
           </a:p>
           <a:p>
@@ -10413,7 +10413,7 @@
                 </a:solidFill>
                 <a:latin typeface="Calibri"/>
               </a:rPr>
-              <a:t>•  Si tenés la torre de más, no te confíes: buscá actividad inmediata antes de que la posición se cierre.</a:t>
+              <a:t>•  Si tienes la torre de más, no te confíes: busca actividad inmediata antes de que la posición se cierre.</a:t>
             </a:r>
           </a:p>
         </p:txBody>
@@ -11015,7 +11015,7 @@
                 </a:solidFill>
                 <a:latin typeface="Calibri"/>
               </a:rPr>
-              <a:t>Pista: Pensá en capturar el caballo con la torre, aceptando entregar calidad a cambio de peones y de una futura pareja de pasados centrales.</a:t>
+              <a:t>Pista: Piensa en capturar el caballo con la torre, aceptando entregar calidad a cambio de peones y de una futura pareja de pasados centrales.</a:t>
             </a:r>
           </a:p>
         </p:txBody>
